--- a/presentations/devops-mechanisms-reference.pptx
+++ b/presentations/devops-mechanisms-reference.pptx
@@ -18,6 +18,7 @@
     <p:sldId id="266" r:id="rId18"/>
     <p:sldId id="267" r:id="rId19"/>
     <p:sldId id="268" r:id="rId20"/>
+    <p:sldId id="269" r:id="rId21"/>
   </p:sldIdLst>
   <p:sldSz cx="12191695" cy="6858000" type="screen4x3"/>
   <p:notesSz cx="6858000" cy="9144000"/>
@@ -520,7 +521,7 @@
           <a:p/>
           <a:p>
             <a:r>
-              <a:t>Historical investigations → managed learning runs → versioned memory → relevance-based retrieval → a new investigation. User instructions, selected skills and tool permissions remain separate controls.</a:t>
+              <a:t>Historical investigations produce managed context; corrective feedback can produce reflections. Later investigations selectively retrieve relevant memories. Maintained instructions, reusable skills and tool permissions are separate controls.</a:t>
             </a:r>
           </a:p>
           <a:p/>
@@ -620,7 +621,7 @@
           <a:p/>
           <a:p>
             <a:r>
-              <a:t>Historical investigations → managed learning runs → versioned memory → relevance-based retrieval → a new investigation. User instructions, selected skills and tool permissions remain separate controls.</a:t>
+              <a:t>Historical investigations produce managed context; corrective feedback can produce reflections. Later investigations selectively retrieve relevant memories. Maintained instructions, reusable skills and tool permissions are separate controls.</a:t>
             </a:r>
           </a:p>
           <a:p/>
@@ -866,19 +867,221 @@
           <a:lstStyle/>
           <a:p>
             <a:r>
-              <a:t>PROPOSED EXERCISE. Use a non-production Agent Space with a resolved, independently reviewed incident and a distinct new investigation. Keep directed actions disabled. Use prepared records if no managed memory is yet available.</a:t>
-            </a:r>
-          </a:p>
-          <a:p>
-            <a:r>
-              <a:t>Exit: Accept only when the new conclusion is supported by current evidence and the retained context is correctly scoped. Record recall as unproven when no read evidence is available.</a:t>
-            </a:r>
-          </a:p>
-          <a:p>
-            <a:r>
-              <a:t>Fallback: Use a prepared memory record and investigation trace. Do not wait for the managed learning schedule during a live session.</a:t>
-            </a:r>
-          </a:p>
+              <a:t># AWS DevOps Agent — mechanisms and enablement</a:t>
+            </a:r>
+          </a:p>
+          <a:p/>
+          <a:p>
+            <a:r>
+              <a:t>Reviewed 21 October 2026. Independent checks and examples are proposed; no live workflow was executed.</a:t>
+            </a:r>
+          </a:p>
+          <a:p/>
+          <a:p>
+            <a:r>
+              <a:t>## Mechanism model</a:t>
+            </a:r>
+          </a:p>
+          <a:p/>
+          <a:p>
+            <a:r>
+              <a:t>A recurring alarm does not prove that its previous root cause has returned. Use historical context to select hypotheses, then test those hypotheses against current telemetry. The documentation describes retained Markdown knowledge, routing by descriptions, and a managed learning process. It does not document a customer-operated model-training switch.</a:t>
+            </a:r>
+          </a:p>
+          <a:p/>
+          <a:p>
+            <a:r>
+              <a:t>Historical investigations produce managed context; corrective feedback can produce reflections. Later investigations selectively retrieve relevant memories. Maintained instructions, reusable skills and tool permissions are separate controls.</a:t>
+            </a:r>
+          </a:p>
+          <a:p/>
+          <a:p>
+            <a:r>
+              <a:t>Documented operational mechanisms; controls and learning schedules are feature-specific. Managed-agent UI availability may vary by rollout.</a:t>
+            </a:r>
+          </a:p>
+          <a:p/>
+          <a:p>
+            <a:r>
+              <a:t>## D-M10 — Record a corrected cause through investigation feedback</a:t>
+            </a:r>
+          </a:p>
+          <a:p/>
+          <a:p>
+            <a:r>
+              <a:t>**Surface:** Completed investigation / Knowledge → Memories</a:t>
+            </a:r>
+          </a:p>
+          <a:p/>
+          <a:p>
+            <a:r>
+              <a:t>**Availability:** Documented corrective-feedback memory</a:t>
+            </a:r>
+          </a:p>
+          <a:p/>
+          <a:p>
+            <a:r>
+              <a:t>**Activation:** Submit an incorrect verdict and the actual root cause</a:t>
+            </a:r>
+          </a:p>
+          <a:p/>
+          <a:p>
+            <a:r>
+              <a:t>### Documented mechanism</a:t>
+            </a:r>
+          </a:p>
+          <a:p/>
+          <a:p>
+            <a:r>
+              <a:t>Corrective feedback can create a memory in the reflections store for later investigations of the alarm. This is distinct from recurring-cause summaries and does not establish model-weight training.</a:t>
+            </a:r>
+          </a:p>
+          <a:p/>
+          <a:p>
+            <a:r>
+              <a:t>### Enable and configure</a:t>
+            </a:r>
+          </a:p>
+          <a:p/>
+          <a:p>
+            <a:r>
+              <a:t>A completed investigation and an independently established cause.</a:t>
+            </a:r>
+          </a:p>
+          <a:p/>
+          <a:p>
+            <a:r>
+              <a:t>1. Open the completed investigation and choose Add feedback, or provide the correction in Chat.</a:t>
+            </a:r>
+          </a:p>
+          <a:p/>
+          <a:p>
+            <a:r>
+              <a:t>2. Select an incorrect verdict and supply the actual root cause. Sharing with AWS requires separate confirmation.</a:t>
+            </a:r>
+          </a:p>
+          <a:p/>
+          <a:p>
+            <a:r>
+              <a:t>3. Inspect Knowledge → Memories → reflections and retain the relevant entry and version.</a:t>
+            </a:r>
+          </a:p>
+          <a:p/>
+          <a:p>
+            <a:r>
+              <a:t>### Scope and persistence</a:t>
+            </a:r>
+          </a:p>
+          <a:p/>
+          <a:p>
+            <a:r>
+              <a:t>Reflection context relates to the alarm. Latest submitted feedback replaces previous feedback for that investigation.</a:t>
+            </a:r>
+          </a:p>
+          <a:p/>
+          <a:p>
+            <a:r>
+              <a:t>### Independent checks — proposed</a:t>
+            </a:r>
+          </a:p>
+          <a:p/>
+          <a:p>
+            <a:r>
+              <a:t>- Proposed: use a reviewed, non-production incident whose established cause differs from the original result.</a:t>
+            </a:r>
+          </a:p>
+          <a:p/>
+          <a:p>
+            <a:r>
+              <a:t>- Record feedback and any resulting reflection; check a separate investigation against new evidence.</a:t>
+            </a:r>
+          </a:p>
+          <a:p/>
+          <a:p>
+            <a:r>
+              <a:t>- Report recall as unverified unless the run exposes evidence that the memory was read.</a:t>
+            </a:r>
+          </a:p>
+          <a:p/>
+          <a:p>
+            <a:r>
+              <a:t>### Record to retain — proposed</a:t>
+            </a:r>
+          </a:p>
+          <a:p/>
+          <a:p>
+            <a:r>
+              <a:t>Investigation ID, reviewed cause, feedback, memory version, subsequent read evidence and reviewer decision.</a:t>
+            </a:r>
+          </a:p>
+          <a:p/>
+          <a:p>
+            <a:r>
+              <a:t>### Stop, correct or remove</a:t>
+            </a:r>
+          </a:p>
+          <a:p/>
+          <a:p>
+            <a:r>
+              <a:t>Update incorrect feedback. Inspect, correct or deactivate affected memories separately; do not assume feedback replacement removes every historical memory version.</a:t>
+            </a:r>
+          </a:p>
+          <a:p/>
+          <a:p>
+            <a:r>
+              <a:t>### Limits and fallback</a:t>
+            </a:r>
+          </a:p>
+          <a:p/>
+          <a:p>
+            <a:r>
+              <a:t>A reflection is retained context, not proof of a future diagnosis or broader execution authority.</a:t>
+            </a:r>
+          </a:p>
+          <a:p/>
+          <a:p>
+            <a:r>
+              <a:t>Keep the reviewed correction as explicit context when reflection creation or recall cannot be observed.</a:t>
+            </a:r>
+          </a:p>
+          <a:p/>
+          <a:p>
+            <a:r>
+              <a:t>### Illustrative task — not executed</a:t>
+            </a:r>
+          </a:p>
+          <a:p/>
+          <a:p>
+            <a:r>
+              <a:t>Illustrative: "The cause was incorrect. The reviewed cause is the staging connection-pool limit; retain the supporting evidence and do not change resources."</a:t>
+            </a:r>
+          </a:p>
+          <a:p/>
+          <a:p>
+            <a:r>
+              <a:t>### Official guidance</a:t>
+            </a:r>
+          </a:p>
+          <a:p/>
+          <a:p>
+            <a:r>
+              <a:t>[DF: Provide feedback on investigations](https://docs.aws.amazon.com/devopsagent/latest/userguide/production-operations-autonomous-incident-response.html#provide-feedback-on-investigations)</a:t>
+            </a:r>
+          </a:p>
+          <a:p/>
+          <a:p>
+            <a:r>
+              <a:t>[DM: DevOps Agent Memories](https://docs.aws.amazon.com/devopsagent/latest/userguide/about-aws-devops-agent-devops-agent-memories.html)</a:t>
+            </a:r>
+          </a:p>
+          <a:p/>
+          <a:p>
+            <a:r>
+              <a:t>[DN: DevOps Agent dated product changes](https://docs.aws.amazon.com/devopsagent/latest/userguide/whats-new.html)</a:t>
+            </a:r>
+          </a:p>
+          <a:p/>
+          <a:p/>
         </p:txBody>
       </p:sp>
       <p:sp>
@@ -1026,6 +1229,86 @@
           <a:lstStyle/>
           <a:p>
             <a:r>
+              <a:t>PROPOSED EXERCISE. Use a non-production Agent Space with a resolved, independently reviewed incident and a distinct new investigation. Keep directed actions disabled. Use prepared records if no managed memory is yet available.</a:t>
+            </a:r>
+          </a:p>
+          <a:p>
+            <a:r>
+              <a:t>Exit: Accept only when the new conclusion is supported by current evidence and the retained context is correctly scoped. Record recall as unproven when no read evidence is available.</a:t>
+            </a:r>
+          </a:p>
+          <a:p>
+            <a:r>
+              <a:t>Fallback: Use a prepared memory record and investigation trace. Do not wait for the managed learning schedule during a live session.</a:t>
+            </a:r>
+          </a:p>
+        </p:txBody>
+      </p:sp>
+      <p:sp>
+        <p:nvSpPr>
+          <p:cNvPr id="4" name="Slide Number Placeholder 3"/>
+          <p:cNvSpPr>
+            <a:spLocks noGrp="1"/>
+          </p:cNvSpPr>
+          <p:nvPr>
+            <p:ph type="sldNum" idx="5" sz="quarter"/>
+          </p:nvPr>
+        </p:nvSpPr>
+        <p:spPr/>
+      </p:sp>
+    </p:spTree>
+  </p:cSld>
+  <p:clrMapOvr>
+    <a:masterClrMapping/>
+  </p:clrMapOvr>
+</p:notes>
+</file>
+
+<file path=ppt/notesSlides/notesSlide14.xml><?xml version="1.0" encoding="utf-8"?>
+<p:notes xmlns:a="http://schemas.openxmlformats.org/drawingml/2006/main" xmlns:p="http://schemas.openxmlformats.org/presentationml/2006/main" xmlns:r="http://schemas.openxmlformats.org/officeDocument/2006/relationships">
+  <p:cSld>
+    <p:spTree>
+      <p:nvGrpSpPr>
+        <p:cNvPr id="1" name=""/>
+        <p:cNvGrpSpPr/>
+        <p:nvPr/>
+      </p:nvGrpSpPr>
+      <p:grpSpPr>
+        <a:xfrm>
+          <a:off x="0" y="0"/>
+          <a:ext cx="0" cy="0"/>
+          <a:chOff x="0" y="0"/>
+          <a:chExt cx="0" cy="0"/>
+        </a:xfrm>
+      </p:grpSpPr>
+      <p:sp>
+        <p:nvSpPr>
+          <p:cNvPr id="2" name="Slide Image Placeholder 1"/>
+          <p:cNvSpPr>
+            <a:spLocks noGrp="1"/>
+          </p:cNvSpPr>
+          <p:nvPr>
+            <p:ph type="sldImg" idx="2"/>
+          </p:nvPr>
+        </p:nvSpPr>
+        <p:spPr/>
+      </p:sp>
+      <p:sp>
+        <p:nvSpPr>
+          <p:cNvPr id="3" name="Notes Placeholder 2"/>
+          <p:cNvSpPr>
+            <a:spLocks noGrp="1"/>
+          </p:cNvSpPr>
+          <p:nvPr>
+            <p:ph type="body" idx="3" sz="quarter"/>
+          </p:nvPr>
+        </p:nvSpPr>
+        <p:spPr/>
+        <p:txBody>
+          <a:bodyPr/>
+          <a:lstStyle/>
+          <a:p>
+            <a:r>
               <a:t>DevOps Agent Memories</a:t>
             </a:r>
           </a:p>
@@ -1046,6 +1329,16 @@
           </a:p>
           <a:p>
             <a:r>
+              <a:t>DevOps Agent dated product changes</a:t>
+            </a:r>
+          </a:p>
+          <a:p>
+            <a:r>
+              <a:t>https://docs.aws.amazon.com/devopsagent/latest/userguide/whats-new.html</a:t>
+            </a:r>
+          </a:p>
+          <a:p>
+            <a:r>
               <a:t>Learned Skills: migration to memory</a:t>
             </a:r>
           </a:p>
@@ -1132,6 +1425,16 @@
           <a:p>
             <a:r>
               <a:t>https://docs.aws.amazon.com/devopsagent/latest/userguide/working-with-devops-agent-working-with-directed-actions.html</a:t>
+            </a:r>
+          </a:p>
+          <a:p>
+            <a:r>
+              <a:t>Provide feedback on investigations</a:t>
+            </a:r>
+          </a:p>
+          <a:p>
+            <a:r>
+              <a:t>https://docs.aws.amazon.com/devopsagent/latest/userguide/production-operations-autonomous-incident-response.html#provide-feedback-on-investigations</a:t>
             </a:r>
           </a:p>
           <a:p/>
@@ -1231,7 +1534,7 @@
           <a:p/>
           <a:p>
             <a:r>
-              <a:t>Historical investigations → managed learning runs → versioned memory → relevance-based retrieval → a new investigation. User instructions, selected skills and tool permissions remain separate controls.</a:t>
+              <a:t>Historical investigations produce managed context; corrective feedback can produce reflections. Later investigations selectively retrieve relevant memories. Maintained instructions, reusable skills and tool permissions are separate controls.</a:t>
             </a:r>
           </a:p>
           <a:p/>
@@ -1261,7 +1564,7 @@
           <a:p/>
           <a:p>
             <a:r>
-              <a:t>**Activation:** Automatic learning; inspect and activate stores</a:t>
+              <a:t>**Activation:** Monitor memory enabled by default; verify store and entry state</a:t>
             </a:r>
           </a:p>
           <a:p/>
@@ -1412,6 +1715,12 @@
           <a:p>
             <a:r>
               <a:t>[DG: Managed agents](https://docs.aws.amazon.com/devopsagent/latest/userguide/working-with-devops-agent-managed-agents.html)</a:t>
+            </a:r>
+          </a:p>
+          <a:p/>
+          <a:p>
+            <a:r>
+              <a:t>[DN: DevOps Agent dated product changes](https://docs.aws.amazon.com/devopsagent/latest/userguide/whats-new.html)</a:t>
             </a:r>
           </a:p>
           <a:p/>
@@ -1507,7 +1816,7 @@
           <a:p/>
           <a:p>
             <a:r>
-              <a:t>Historical investigations → managed learning runs → versioned memory → relevance-based retrieval → a new investigation. User instructions, selected skills and tool permissions remain separate controls.</a:t>
+              <a:t>Historical investigations produce managed context; corrective feedback can produce reflections. Later investigations selectively retrieve relevant memories. Maintained instructions, reusable skills and tool permissions are separate controls.</a:t>
             </a:r>
           </a:p>
           <a:p/>
@@ -1789,7 +2098,7 @@
           <a:p/>
           <a:p>
             <a:r>
-              <a:t>Historical investigations → managed learning runs → versioned memory → relevance-based retrieval → a new investigation. User instructions, selected skills and tool permissions remain separate controls.</a:t>
+              <a:t>Historical investigations produce managed context; corrective feedback can produce reflections. Later investigations selectively retrieve relevant memories. Maintained instructions, reusable skills and tool permissions are separate controls.</a:t>
             </a:r>
           </a:p>
           <a:p/>
@@ -2065,7 +2374,7 @@
           <a:p/>
           <a:p>
             <a:r>
-              <a:t>Historical investigations → managed learning runs → versioned memory → relevance-based retrieval → a new investigation. User instructions, selected skills and tool permissions remain separate controls.</a:t>
+              <a:t>Historical investigations produce managed context; corrective feedback can produce reflections. Later investigations selectively retrieve relevant memories. Maintained instructions, reusable skills and tool permissions are separate controls.</a:t>
             </a:r>
           </a:p>
           <a:p/>
@@ -2335,7 +2644,7 @@
           <a:p/>
           <a:p>
             <a:r>
-              <a:t>Historical investigations → managed learning runs → versioned memory → relevance-based retrieval → a new investigation. User instructions, selected skills and tool permissions remain separate controls.</a:t>
+              <a:t>Historical investigations produce managed context; corrective feedback can produce reflections. Later investigations selectively retrieve relevant memories. Maintained instructions, reusable skills and tool permissions are separate controls.</a:t>
             </a:r>
           </a:p>
           <a:p/>
@@ -2605,7 +2914,7 @@
           <a:p/>
           <a:p>
             <a:r>
-              <a:t>Historical investigations → managed learning runs → versioned memory → relevance-based retrieval → a new investigation. User instructions, selected skills and tool permissions remain separate controls.</a:t>
+              <a:t>Historical investigations produce managed context; corrective feedback can produce reflections. Later investigations selectively retrieve relevant memories. Maintained instructions, reusable skills and tool permissions are separate controls.</a:t>
             </a:r>
           </a:p>
           <a:p/>
@@ -2875,7 +3184,7 @@
           <a:p/>
           <a:p>
             <a:r>
-              <a:t>Historical investigations → managed learning runs → versioned memory → relevance-based retrieval → a new investigation. User instructions, selected skills and tool permissions remain separate controls.</a:t>
+              <a:t>Historical investigations produce managed context; corrective feedback can produce reflections. Later investigations selectively retrieve relevant memories. Maintained instructions, reusable skills and tool permissions are separate controls.</a:t>
             </a:r>
           </a:p>
           <a:p/>
@@ -3145,7 +3454,7 @@
           <a:p/>
           <a:p>
             <a:r>
-              <a:t>Historical investigations → managed learning runs → versioned memory → relevance-based retrieval → a new investigation. User instructions, selected skills and tool permissions remain separate controls.</a:t>
+              <a:t>Historical investigations produce managed context; corrective feedback can produce reflections. Later investigations selectively retrieve relevant memories. Maintained instructions, reusable skills and tool permissions are separate controls.</a:t>
             </a:r>
           </a:p>
           <a:p/>
@@ -6699,7 +7008,7 @@
               </a:defRPr>
             </a:pPr>
             <a:r>
-              <a:t>Historical investigations → managed learning runs → versioned memory → relevance-based retrieval → a new investigation. User instructions, selected skills and tool permissions remain separate controls.</a:t>
+              <a:t>Historical investigations produce managed context; corrective feedback can produce reflections. Later investigations selectively retrieve relevant memories. Maintained instructions, reusable skills and tool permissions are separate controls.</a:t>
             </a:r>
           </a:p>
         </p:txBody>
@@ -7838,7 +8147,7 @@
               </a:defRPr>
             </a:pPr>
             <a:r>
-              <a:t>OPTIONAL 12-MINUTE EXERCISE / PART 1 OF 2</a:t>
+              <a:t>D-M10 / MEMORY</a:t>
             </a:r>
           </a:p>
         </p:txBody>
@@ -7877,7 +8186,7 @@
               </a:defRPr>
             </a:pPr>
             <a:r>
-              <a:t>Test recall without assuming the old cause has returned</a:t>
+              <a:t>Record a corrected cause through investigation feedback</a:t>
             </a:r>
           </a:p>
         </p:txBody>
@@ -8011,8 +8320,8 @@
         </p:nvSpPr>
         <p:spPr>
           <a:xfrm>
-            <a:off x="502920" y="1828800"/>
-            <a:ext cx="11183112" cy="1234440"/>
+            <a:off x="502920" y="1810512"/>
+            <a:ext cx="5486400" cy="1929384"/>
           </a:xfrm>
           <a:prstGeom prst="rect">
             <a:avLst/>
@@ -8054,8 +8363,8 @@
         </p:nvSpPr>
         <p:spPr>
           <a:xfrm>
-            <a:off x="694944" y="1993392"/>
-            <a:ext cx="1325880" cy="301752"/>
+            <a:off x="685800" y="1947672"/>
+            <a:ext cx="5120640" cy="228600"/>
           </a:xfrm>
           <a:prstGeom prst="rect">
             <a:avLst/>
@@ -8072,7 +8381,7 @@
               <a:spcAft>
                 <a:spcPts val="600"/>
               </a:spcAft>
-              <a:defRPr sz="1600" b="1">
+              <a:defRPr sz="1100" b="1">
                 <a:solidFill>
                   <a:srgbClr val="975700"/>
                 </a:solidFill>
@@ -8080,7 +8389,7 @@
               </a:defRPr>
             </a:pPr>
             <a:r>
-              <a:t>00:00–01:30</a:t>
+              <a:t>DOCUMENTED OPERATION</a:t>
             </a:r>
           </a:p>
         </p:txBody>
@@ -8093,8 +8402,8 @@
         </p:nvSpPr>
         <p:spPr>
           <a:xfrm>
-            <a:off x="2130552" y="1938528"/>
-            <a:ext cx="9281160" cy="301752"/>
+            <a:off x="685800" y="2313432"/>
+            <a:ext cx="5120640" cy="1316736"/>
           </a:xfrm>
           <a:prstGeom prst="rect">
             <a:avLst/>
@@ -8111,7 +8420,7 @@
               <a:spcAft>
                 <a:spcPts val="600"/>
               </a:spcAft>
-              <a:defRPr sz="2000" b="1">
+              <a:defRPr sz="1800" b="0">
                 <a:solidFill>
                   <a:srgbClr val="182D43"/>
                 </a:solidFill>
@@ -8119,60 +8428,21 @@
               </a:defRPr>
             </a:pPr>
             <a:r>
-              <a:t>Scope the comparison</a:t>
-            </a:r>
-          </a:p>
-        </p:txBody>
-      </p:sp>
-      <p:sp>
-        <p:nvSpPr>
-          <p:cNvPr id="11" name="TextBox 10"/>
-          <p:cNvSpPr txBox="1"/>
-          <p:nvPr/>
-        </p:nvSpPr>
-        <p:spPr>
-          <a:xfrm>
-            <a:off x="2130552" y="2331720"/>
-            <a:ext cx="9189720" cy="621792"/>
-          </a:xfrm>
-          <a:prstGeom prst="rect">
-            <a:avLst/>
-          </a:prstGeom>
-          <a:noFill/>
-        </p:spPr>
-        <p:txBody>
-          <a:bodyPr wrap="square" lIns="0" rIns="0" tIns="0" bIns="0">
-            <a:spAutoFit/>
-          </a:bodyPr>
-          <a:lstStyle/>
-          <a:p>
-            <a:pPr>
-              <a:spcAft>
-                <a:spcPts val="600"/>
-              </a:spcAft>
-              <a:defRPr sz="1600" b="0">
-                <a:solidFill>
-                  <a:srgbClr val="182D43"/>
-                </a:solidFill>
-                <a:latin typeface="Aptos"/>
-              </a:defRPr>
-            </a:pPr>
-            <a:r>
-              <a:t>Name the old incident, a new symptom window and the read-only resource boundary. Gate: Two distinct investigation IDs and an agreed evidence window.</a:t>
-            </a:r>
-          </a:p>
-        </p:txBody>
-      </p:sp>
-      <p:sp>
-        <p:nvSpPr>
-          <p:cNvPr id="12" name="Rectangle 11"/>
+              <a:t>Corrective feedback creates alarm-related reflection context for later investigations.</a:t>
+            </a:r>
+          </a:p>
+        </p:txBody>
+      </p:sp>
+      <p:sp>
+        <p:nvSpPr>
+          <p:cNvPr id="11" name="Rectangle 10"/>
           <p:cNvSpPr/>
           <p:nvPr/>
         </p:nvSpPr>
         <p:spPr>
           <a:xfrm>
-            <a:off x="502920" y="3227832"/>
-            <a:ext cx="11183112" cy="1234440"/>
+            <a:off x="502920" y="3886200"/>
+            <a:ext cx="5486400" cy="2286000"/>
           </a:xfrm>
           <a:prstGeom prst="rect">
             <a:avLst/>
@@ -8208,14 +8478,53 @@
       </p:sp>
       <p:sp>
         <p:nvSpPr>
+          <p:cNvPr id="12" name="TextBox 11"/>
+          <p:cNvSpPr txBox="1"/>
+          <p:nvPr/>
+        </p:nvSpPr>
+        <p:spPr>
+          <a:xfrm>
+            <a:off x="685800" y="4023360"/>
+            <a:ext cx="5120640" cy="228600"/>
+          </a:xfrm>
+          <a:prstGeom prst="rect">
+            <a:avLst/>
+          </a:prstGeom>
+          <a:noFill/>
+        </p:spPr>
+        <p:txBody>
+          <a:bodyPr wrap="square" lIns="0" rIns="0" tIns="0" bIns="0">
+            <a:spAutoFit/>
+          </a:bodyPr>
+          <a:lstStyle/>
+          <a:p>
+            <a:pPr>
+              <a:spcAft>
+                <a:spcPts val="600"/>
+              </a:spcAft>
+              <a:defRPr sz="1100" b="1">
+                <a:solidFill>
+                  <a:srgbClr val="975700"/>
+                </a:solidFill>
+                <a:latin typeface="Aptos"/>
+              </a:defRPr>
+            </a:pPr>
+            <a:r>
+              <a:t>ENABLE / CONFIGURE</a:t>
+            </a:r>
+          </a:p>
+        </p:txBody>
+      </p:sp>
+      <p:sp>
+        <p:nvSpPr>
           <p:cNvPr id="13" name="TextBox 12"/>
           <p:cNvSpPr txBox="1"/>
           <p:nvPr/>
         </p:nvSpPr>
         <p:spPr>
           <a:xfrm>
-            <a:off x="694944" y="3392424"/>
-            <a:ext cx="1325880" cy="301752"/>
+            <a:off x="685800" y="4389120"/>
+            <a:ext cx="5120640" cy="1673352"/>
           </a:xfrm>
           <a:prstGeom prst="rect">
             <a:avLst/>
@@ -8232,46 +8541,7 @@
               <a:spcAft>
                 <a:spcPts val="600"/>
               </a:spcAft>
-              <a:defRPr sz="1600" b="1">
-                <a:solidFill>
-                  <a:srgbClr val="975700"/>
-                </a:solidFill>
-                <a:latin typeface="Aptos"/>
-              </a:defRPr>
-            </a:pPr>
-            <a:r>
-              <a:t>01:30–03:30</a:t>
-            </a:r>
-          </a:p>
-        </p:txBody>
-      </p:sp>
-      <p:sp>
-        <p:nvSpPr>
-          <p:cNvPr id="14" name="TextBox 13"/>
-          <p:cNvSpPr txBox="1"/>
-          <p:nvPr/>
-        </p:nvSpPr>
-        <p:spPr>
-          <a:xfrm>
-            <a:off x="2130552" y="3337560"/>
-            <a:ext cx="9281160" cy="301752"/>
-          </a:xfrm>
-          <a:prstGeom prst="rect">
-            <a:avLst/>
-          </a:prstGeom>
-          <a:noFill/>
-        </p:spPr>
-        <p:txBody>
-          <a:bodyPr wrap="square" lIns="0" rIns="0" tIns="0" bIns="0">
-            <a:spAutoFit/>
-          </a:bodyPr>
-          <a:lstStyle/>
-          <a:p>
-            <a:pPr>
-              <a:spcAft>
-                <a:spcPts val="600"/>
-              </a:spcAft>
-              <a:defRPr sz="2000" b="1">
+              <a:defRPr sz="2000" b="0">
                 <a:solidFill>
                   <a:srgbClr val="182D43"/>
                 </a:solidFill>
@@ -8279,38 +8549,15 @@
               </a:defRPr>
             </a:pPr>
             <a:r>
-              <a:t>Inspect retained knowledge</a:t>
-            </a:r>
-          </a:p>
-        </p:txBody>
-      </p:sp>
-      <p:sp>
-        <p:nvSpPr>
-          <p:cNvPr id="15" name="TextBox 14"/>
-          <p:cNvSpPr txBox="1"/>
-          <p:nvPr/>
-        </p:nvSpPr>
-        <p:spPr>
-          <a:xfrm>
-            <a:off x="2130552" y="3730752"/>
-            <a:ext cx="9189720" cy="621792"/>
-          </a:xfrm>
-          <a:prstGeom prst="rect">
-            <a:avLst/>
-          </a:prstGeom>
-          <a:noFill/>
-        </p:spPr>
-        <p:txBody>
-          <a:bodyPr wrap="square" lIns="0" rIns="0" tIns="0" bIns="0">
-            <a:spAutoFit/>
-          </a:bodyPr>
-          <a:lstStyle/>
-          <a:p>
-            <a:pPr>
-              <a:spcAft>
-                <a:spcPts val="600"/>
-              </a:spcAft>
-              <a:defRPr sz="1600" b="0">
+              <a:t>1. Open a completed investigation.</a:t>
+            </a:r>
+          </a:p>
+          <a:p>
+            <a:pPr>
+              <a:spcAft>
+                <a:spcPts val="600"/>
+              </a:spcAft>
+              <a:defRPr sz="2000" b="0">
                 <a:solidFill>
                   <a:srgbClr val="182D43"/>
                 </a:solidFill>
@@ -8318,21 +8565,37 @@
               </a:defRPr>
             </a:pPr>
             <a:r>
-              <a:t>Inspect Knowledge → Memories for the relevant monitor and its versions. Gate: Entry is relevant, active and traceable to the reviewed incident.</a:t>
-            </a:r>
-          </a:p>
-        </p:txBody>
-      </p:sp>
-      <p:sp>
-        <p:nvSpPr>
-          <p:cNvPr id="16" name="Rectangle 15"/>
+              <a:t>2. Submit incorrect verdict and actual cause.</a:t>
+            </a:r>
+          </a:p>
+          <a:p>
+            <a:pPr>
+              <a:spcAft>
+                <a:spcPts val="600"/>
+              </a:spcAft>
+              <a:defRPr sz="2000" b="0">
+                <a:solidFill>
+                  <a:srgbClr val="182D43"/>
+                </a:solidFill>
+                <a:latin typeface="Aptos"/>
+              </a:defRPr>
+            </a:pPr>
+            <a:r>
+              <a:t>3. Inspect the reflections entry and version.</a:t>
+            </a:r>
+          </a:p>
+        </p:txBody>
+      </p:sp>
+      <p:sp>
+        <p:nvSpPr>
+          <p:cNvPr id="14" name="Rectangle 13"/>
           <p:cNvSpPr/>
           <p:nvPr/>
         </p:nvSpPr>
         <p:spPr>
           <a:xfrm>
-            <a:off x="502920" y="4626864"/>
-            <a:ext cx="11183112" cy="1234440"/>
+            <a:off x="6199632" y="1810512"/>
+            <a:ext cx="5486400" cy="1929384"/>
           </a:xfrm>
           <a:prstGeom prst="rect">
             <a:avLst/>
@@ -8368,14 +8631,14 @@
       </p:sp>
       <p:sp>
         <p:nvSpPr>
-          <p:cNvPr id="17" name="TextBox 16"/>
+          <p:cNvPr id="15" name="TextBox 14"/>
           <p:cNvSpPr txBox="1"/>
           <p:nvPr/>
         </p:nvSpPr>
         <p:spPr>
           <a:xfrm>
-            <a:off x="694944" y="4791456"/>
-            <a:ext cx="1325880" cy="301752"/>
+            <a:off x="6382512" y="1947672"/>
+            <a:ext cx="5120640" cy="228600"/>
           </a:xfrm>
           <a:prstGeom prst="rect">
             <a:avLst/>
@@ -8392,7 +8655,7 @@
               <a:spcAft>
                 <a:spcPts val="600"/>
               </a:spcAft>
-              <a:defRPr sz="1600" b="1">
+              <a:defRPr sz="1100" b="1">
                 <a:solidFill>
                   <a:srgbClr val="975700"/>
                 </a:solidFill>
@@ -8400,8 +8663,90 @@
               </a:defRPr>
             </a:pPr>
             <a:r>
-              <a:t>03:30–05:30</a:t>
-            </a:r>
+              <a:t>INDEPENDENT CHECK — PROPOSED</a:t>
+            </a:r>
+          </a:p>
+        </p:txBody>
+      </p:sp>
+      <p:sp>
+        <p:nvSpPr>
+          <p:cNvPr id="16" name="TextBox 15"/>
+          <p:cNvSpPr txBox="1"/>
+          <p:nvPr/>
+        </p:nvSpPr>
+        <p:spPr>
+          <a:xfrm>
+            <a:off x="6382512" y="2313432"/>
+            <a:ext cx="5120640" cy="1316736"/>
+          </a:xfrm>
+          <a:prstGeom prst="rect">
+            <a:avLst/>
+          </a:prstGeom>
+          <a:noFill/>
+        </p:spPr>
+        <p:txBody>
+          <a:bodyPr wrap="square" lIns="0" rIns="0" tIns="0" bIns="0">
+            <a:spAutoFit/>
+          </a:bodyPr>
+          <a:lstStyle/>
+          <a:p>
+            <a:pPr>
+              <a:spcAft>
+                <a:spcPts val="600"/>
+              </a:spcAft>
+              <a:defRPr sz="1900" b="0">
+                <a:solidFill>
+                  <a:srgbClr val="182D43"/>
+                </a:solidFill>
+                <a:latin typeface="Aptos"/>
+              </a:defRPr>
+            </a:pPr>
+            <a:r>
+              <a:t>Report recall as unverified unless the run exposes evidence that the memory was read.</a:t>
+            </a:r>
+          </a:p>
+        </p:txBody>
+      </p:sp>
+      <p:sp>
+        <p:nvSpPr>
+          <p:cNvPr id="17" name="Rectangle 16"/>
+          <p:cNvSpPr/>
+          <p:nvPr/>
+        </p:nvSpPr>
+        <p:spPr>
+          <a:xfrm>
+            <a:off x="6199632" y="3886200"/>
+            <a:ext cx="5486400" cy="2286000"/>
+          </a:xfrm>
+          <a:prstGeom prst="rect">
+            <a:avLst/>
+          </a:prstGeom>
+          <a:solidFill>
+            <a:srgbClr val="F1F5F9"/>
+          </a:solidFill>
+          <a:ln>
+            <a:noFill/>
+          </a:ln>
+        </p:spPr>
+        <p:style>
+          <a:lnRef idx="1">
+            <a:schemeClr val="accent1"/>
+          </a:lnRef>
+          <a:fillRef idx="3">
+            <a:schemeClr val="accent1"/>
+          </a:fillRef>
+          <a:effectRef idx="2">
+            <a:schemeClr val="accent1"/>
+          </a:effectRef>
+          <a:fontRef idx="minor">
+            <a:schemeClr val="lt1"/>
+          </a:fontRef>
+        </p:style>
+        <p:txBody>
+          <a:bodyPr rtlCol="0" anchor="ctr"/>
+          <a:lstStyle/>
+          <a:p>
+            <a:pPr algn="ctr"/>
           </a:p>
         </p:txBody>
       </p:sp>
@@ -8413,8 +8758,8 @@
         </p:nvSpPr>
         <p:spPr>
           <a:xfrm>
-            <a:off x="2130552" y="4736592"/>
-            <a:ext cx="9281160" cy="301752"/>
+            <a:off x="6382512" y="4023360"/>
+            <a:ext cx="5120640" cy="228600"/>
           </a:xfrm>
           <a:prstGeom prst="rect">
             <a:avLst/>
@@ -8431,15 +8776,15 @@
               <a:spcAft>
                 <a:spcPts val="600"/>
               </a:spcAft>
-              <a:defRPr sz="2000" b="1">
-                <a:solidFill>
-                  <a:srgbClr val="182D43"/>
-                </a:solidFill>
-                <a:latin typeface="Aptos"/>
-              </a:defRPr>
-            </a:pPr>
-            <a:r>
-              <a:t>Check the consumer</a:t>
+              <a:defRPr sz="1100" b="1">
+                <a:solidFill>
+                  <a:srgbClr val="975700"/>
+                </a:solidFill>
+                <a:latin typeface="Aptos"/>
+              </a:defRPr>
+            </a:pPr>
+            <a:r>
+              <a:t>CONTROL AND LIMITATION</a:t>
             </a:r>
           </a:p>
         </p:txBody>
@@ -8452,8 +8797,8 @@
         </p:nvSpPr>
         <p:spPr>
           <a:xfrm>
-            <a:off x="2130552" y="5129784"/>
-            <a:ext cx="9189720" cy="621792"/>
+            <a:off x="6382512" y="4389120"/>
+            <a:ext cx="5120640" cy="1673352"/>
           </a:xfrm>
           <a:prstGeom prst="rect">
             <a:avLst/>
@@ -8470,7 +8815,7 @@
               <a:spcAft>
                 <a:spcPts val="600"/>
               </a:spcAft>
-              <a:defRPr sz="1600" b="0">
+              <a:defRPr sz="2000" b="0">
                 <a:solidFill>
                   <a:srgbClr val="182D43"/>
                 </a:solidFill>
@@ -8478,7 +8823,46 @@
               </a:defRPr>
             </a:pPr>
             <a:r>
-              <a:t>For a custom agent, explicitly attach the chosen store. Gate: Correct store attached; no unrelated tool access added.</a:t>
+              <a:t>No diagnosis guarantee. Sharing feedback with AWS requires separate confirmation.</a:t>
+            </a:r>
+          </a:p>
+        </p:txBody>
+      </p:sp>
+      <p:sp>
+        <p:nvSpPr>
+          <p:cNvPr id="20" name="TextBox 19"/>
+          <p:cNvSpPr txBox="1"/>
+          <p:nvPr/>
+        </p:nvSpPr>
+        <p:spPr>
+          <a:xfrm>
+            <a:off x="594360" y="6236208"/>
+            <a:ext cx="10972800" cy="182880"/>
+          </a:xfrm>
+          <a:prstGeom prst="rect">
+            <a:avLst/>
+          </a:prstGeom>
+          <a:noFill/>
+        </p:spPr>
+        <p:txBody>
+          <a:bodyPr wrap="square" lIns="0" rIns="0" tIns="0" bIns="0">
+            <a:spAutoFit/>
+          </a:bodyPr>
+          <a:lstStyle/>
+          <a:p>
+            <a:pPr>
+              <a:spcAft>
+                <a:spcPts val="600"/>
+              </a:spcAft>
+              <a:defRPr sz="900" b="0">
+                <a:solidFill>
+                  <a:srgbClr val="52657A"/>
+                </a:solidFill>
+                <a:latin typeface="Aptos"/>
+              </a:defRPr>
+            </a:pPr>
+            <a:r>
+              <a:t>Official sources: DF, DM, DN · Completed investigation / Knowledge → Memories</a:t>
             </a:r>
           </a:p>
         </p:txBody>
@@ -8586,7 +8970,7 @@
               </a:defRPr>
             </a:pPr>
             <a:r>
-              <a:t>OPTIONAL 12-MINUTE EXERCISE / PART 2 OF 2</a:t>
+              <a:t>OPTIONAL 12-MINUTE EXERCISE / PART 1 OF 2</a:t>
             </a:r>
           </a:p>
         </p:txBody>
@@ -8828,7 +9212,7 @@
               </a:defRPr>
             </a:pPr>
             <a:r>
-              <a:t>05:30–08:00</a:t>
+              <a:t>00:00–01:30</a:t>
             </a:r>
           </a:p>
         </p:txBody>
@@ -8867,7 +9251,7 @@
               </a:defRPr>
             </a:pPr>
             <a:r>
-              <a:t>Start a separate investigation</a:t>
+              <a:t>Scope the comparison</a:t>
             </a:r>
           </a:p>
         </p:txBody>
@@ -8906,7 +9290,7 @@
               </a:defRPr>
             </a:pPr>
             <a:r>
-              <a:t>Ask for current evidence and disconfirming observations. Gate: New task, current data and a record of recalled context if observable.</a:t>
+              <a:t>Name the old incident, a new symptom window and the read-only resource boundary. Gate: Two distinct investigation IDs and an agreed evidence window.</a:t>
             </a:r>
           </a:p>
         </p:txBody>
@@ -8988,7 +9372,7 @@
               </a:defRPr>
             </a:pPr>
             <a:r>
-              <a:t>08:00–10:30</a:t>
+              <a:t>01:30–03:30</a:t>
             </a:r>
           </a:p>
         </p:txBody>
@@ -9027,7 +9411,7 @@
               </a:defRPr>
             </a:pPr>
             <a:r>
-              <a:t>Challenge the conclusion</a:t>
+              <a:t>Inspect retained knowledge</a:t>
             </a:r>
           </a:p>
         </p:txBody>
@@ -9066,7 +9450,7 @@
               </a:defRPr>
             </a:pPr>
             <a:r>
-              <a:t>Compare proposed cause with telemetry; do not count a matching narrative as proof of recall. Gate: Independent evidence supports or rejects the hypothesis.</a:t>
+              <a:t>Inspect Knowledge → Memories for the relevant monitor and its versions. Gate: Entry is relevant, active and traceable to the reviewed incident.</a:t>
             </a:r>
           </a:p>
         </p:txBody>
@@ -9148,7 +9532,7 @@
               </a:defRPr>
             </a:pPr>
             <a:r>
-              <a:t>10:30–12:00</a:t>
+              <a:t>03:30–05:30</a:t>
             </a:r>
           </a:p>
         </p:txBody>
@@ -9187,7 +9571,7 @@
               </a:defRPr>
             </a:pPr>
             <a:r>
-              <a:t>Correct or exclude stale knowledge</a:t>
+              <a:t>Check the consumer</a:t>
             </a:r>
           </a:p>
         </p:txBody>
@@ -9226,7 +9610,7 @@
               </a:defRPr>
             </a:pPr>
             <a:r>
-              <a:t>Update or deactivate an incorrect item and retain the review record. Gate: Correction recorded and assessed in a new session.</a:t>
+              <a:t>For a custom agent, explicitly attach the chosen store. Gate: Correct store attached; no unrelated tool access added.</a:t>
             </a:r>
           </a:p>
         </p:txBody>
@@ -9334,7 +9718,7 @@
               </a:defRPr>
             </a:pPr>
             <a:r>
-              <a:t>OFFICIAL DOCUMENTATION</a:t>
+              <a:t>OPTIONAL 12-MINUTE EXERCISE / PART 2 OF 2</a:t>
             </a:r>
           </a:p>
         </p:txBody>
@@ -9373,7 +9757,7 @@
               </a:defRPr>
             </a:pPr>
             <a:r>
-              <a:t>Evidence and delivery boundary</a:t>
+              <a:t>Test recall without assuming the old cause has returned</a:t>
             </a:r>
           </a:p>
         </p:txBody>
@@ -9501,6 +9885,754 @@
       </p:sp>
       <p:sp>
         <p:nvSpPr>
+          <p:cNvPr id="8" name="Rectangle 7"/>
+          <p:cNvSpPr/>
+          <p:nvPr/>
+        </p:nvSpPr>
+        <p:spPr>
+          <a:xfrm>
+            <a:off x="502920" y="1828800"/>
+            <a:ext cx="11183112" cy="1234440"/>
+          </a:xfrm>
+          <a:prstGeom prst="rect">
+            <a:avLst/>
+          </a:prstGeom>
+          <a:solidFill>
+            <a:srgbClr val="F1F5F9"/>
+          </a:solidFill>
+          <a:ln>
+            <a:noFill/>
+          </a:ln>
+        </p:spPr>
+        <p:style>
+          <a:lnRef idx="1">
+            <a:schemeClr val="accent1"/>
+          </a:lnRef>
+          <a:fillRef idx="3">
+            <a:schemeClr val="accent1"/>
+          </a:fillRef>
+          <a:effectRef idx="2">
+            <a:schemeClr val="accent1"/>
+          </a:effectRef>
+          <a:fontRef idx="minor">
+            <a:schemeClr val="lt1"/>
+          </a:fontRef>
+        </p:style>
+        <p:txBody>
+          <a:bodyPr rtlCol="0" anchor="ctr"/>
+          <a:lstStyle/>
+          <a:p>
+            <a:pPr algn="ctr"/>
+          </a:p>
+        </p:txBody>
+      </p:sp>
+      <p:sp>
+        <p:nvSpPr>
+          <p:cNvPr id="9" name="TextBox 8"/>
+          <p:cNvSpPr txBox="1"/>
+          <p:nvPr/>
+        </p:nvSpPr>
+        <p:spPr>
+          <a:xfrm>
+            <a:off x="694944" y="1993392"/>
+            <a:ext cx="1325880" cy="301752"/>
+          </a:xfrm>
+          <a:prstGeom prst="rect">
+            <a:avLst/>
+          </a:prstGeom>
+          <a:noFill/>
+        </p:spPr>
+        <p:txBody>
+          <a:bodyPr wrap="square" lIns="0" rIns="0" tIns="0" bIns="0">
+            <a:spAutoFit/>
+          </a:bodyPr>
+          <a:lstStyle/>
+          <a:p>
+            <a:pPr>
+              <a:spcAft>
+                <a:spcPts val="600"/>
+              </a:spcAft>
+              <a:defRPr sz="1600" b="1">
+                <a:solidFill>
+                  <a:srgbClr val="975700"/>
+                </a:solidFill>
+                <a:latin typeface="Aptos"/>
+              </a:defRPr>
+            </a:pPr>
+            <a:r>
+              <a:t>05:30–08:00</a:t>
+            </a:r>
+          </a:p>
+        </p:txBody>
+      </p:sp>
+      <p:sp>
+        <p:nvSpPr>
+          <p:cNvPr id="10" name="TextBox 9"/>
+          <p:cNvSpPr txBox="1"/>
+          <p:nvPr/>
+        </p:nvSpPr>
+        <p:spPr>
+          <a:xfrm>
+            <a:off x="2130552" y="1938528"/>
+            <a:ext cx="9281160" cy="301752"/>
+          </a:xfrm>
+          <a:prstGeom prst="rect">
+            <a:avLst/>
+          </a:prstGeom>
+          <a:noFill/>
+        </p:spPr>
+        <p:txBody>
+          <a:bodyPr wrap="square" lIns="0" rIns="0" tIns="0" bIns="0">
+            <a:spAutoFit/>
+          </a:bodyPr>
+          <a:lstStyle/>
+          <a:p>
+            <a:pPr>
+              <a:spcAft>
+                <a:spcPts val="600"/>
+              </a:spcAft>
+              <a:defRPr sz="2000" b="1">
+                <a:solidFill>
+                  <a:srgbClr val="182D43"/>
+                </a:solidFill>
+                <a:latin typeface="Aptos"/>
+              </a:defRPr>
+            </a:pPr>
+            <a:r>
+              <a:t>Start a separate investigation</a:t>
+            </a:r>
+          </a:p>
+        </p:txBody>
+      </p:sp>
+      <p:sp>
+        <p:nvSpPr>
+          <p:cNvPr id="11" name="TextBox 10"/>
+          <p:cNvSpPr txBox="1"/>
+          <p:nvPr/>
+        </p:nvSpPr>
+        <p:spPr>
+          <a:xfrm>
+            <a:off x="2130552" y="2331720"/>
+            <a:ext cx="9189720" cy="621792"/>
+          </a:xfrm>
+          <a:prstGeom prst="rect">
+            <a:avLst/>
+          </a:prstGeom>
+          <a:noFill/>
+        </p:spPr>
+        <p:txBody>
+          <a:bodyPr wrap="square" lIns="0" rIns="0" tIns="0" bIns="0">
+            <a:spAutoFit/>
+          </a:bodyPr>
+          <a:lstStyle/>
+          <a:p>
+            <a:pPr>
+              <a:spcAft>
+                <a:spcPts val="600"/>
+              </a:spcAft>
+              <a:defRPr sz="1600" b="0">
+                <a:solidFill>
+                  <a:srgbClr val="182D43"/>
+                </a:solidFill>
+                <a:latin typeface="Aptos"/>
+              </a:defRPr>
+            </a:pPr>
+            <a:r>
+              <a:t>Ask for current evidence and disconfirming observations. Gate: New task, current data and a record of recalled context if observable.</a:t>
+            </a:r>
+          </a:p>
+        </p:txBody>
+      </p:sp>
+      <p:sp>
+        <p:nvSpPr>
+          <p:cNvPr id="12" name="Rectangle 11"/>
+          <p:cNvSpPr/>
+          <p:nvPr/>
+        </p:nvSpPr>
+        <p:spPr>
+          <a:xfrm>
+            <a:off x="502920" y="3227832"/>
+            <a:ext cx="11183112" cy="1234440"/>
+          </a:xfrm>
+          <a:prstGeom prst="rect">
+            <a:avLst/>
+          </a:prstGeom>
+          <a:solidFill>
+            <a:srgbClr val="F1F5F9"/>
+          </a:solidFill>
+          <a:ln>
+            <a:noFill/>
+          </a:ln>
+        </p:spPr>
+        <p:style>
+          <a:lnRef idx="1">
+            <a:schemeClr val="accent1"/>
+          </a:lnRef>
+          <a:fillRef idx="3">
+            <a:schemeClr val="accent1"/>
+          </a:fillRef>
+          <a:effectRef idx="2">
+            <a:schemeClr val="accent1"/>
+          </a:effectRef>
+          <a:fontRef idx="minor">
+            <a:schemeClr val="lt1"/>
+          </a:fontRef>
+        </p:style>
+        <p:txBody>
+          <a:bodyPr rtlCol="0" anchor="ctr"/>
+          <a:lstStyle/>
+          <a:p>
+            <a:pPr algn="ctr"/>
+          </a:p>
+        </p:txBody>
+      </p:sp>
+      <p:sp>
+        <p:nvSpPr>
+          <p:cNvPr id="13" name="TextBox 12"/>
+          <p:cNvSpPr txBox="1"/>
+          <p:nvPr/>
+        </p:nvSpPr>
+        <p:spPr>
+          <a:xfrm>
+            <a:off x="694944" y="3392424"/>
+            <a:ext cx="1325880" cy="301752"/>
+          </a:xfrm>
+          <a:prstGeom prst="rect">
+            <a:avLst/>
+          </a:prstGeom>
+          <a:noFill/>
+        </p:spPr>
+        <p:txBody>
+          <a:bodyPr wrap="square" lIns="0" rIns="0" tIns="0" bIns="0">
+            <a:spAutoFit/>
+          </a:bodyPr>
+          <a:lstStyle/>
+          <a:p>
+            <a:pPr>
+              <a:spcAft>
+                <a:spcPts val="600"/>
+              </a:spcAft>
+              <a:defRPr sz="1600" b="1">
+                <a:solidFill>
+                  <a:srgbClr val="975700"/>
+                </a:solidFill>
+                <a:latin typeface="Aptos"/>
+              </a:defRPr>
+            </a:pPr>
+            <a:r>
+              <a:t>08:00–10:30</a:t>
+            </a:r>
+          </a:p>
+        </p:txBody>
+      </p:sp>
+      <p:sp>
+        <p:nvSpPr>
+          <p:cNvPr id="14" name="TextBox 13"/>
+          <p:cNvSpPr txBox="1"/>
+          <p:nvPr/>
+        </p:nvSpPr>
+        <p:spPr>
+          <a:xfrm>
+            <a:off x="2130552" y="3337560"/>
+            <a:ext cx="9281160" cy="301752"/>
+          </a:xfrm>
+          <a:prstGeom prst="rect">
+            <a:avLst/>
+          </a:prstGeom>
+          <a:noFill/>
+        </p:spPr>
+        <p:txBody>
+          <a:bodyPr wrap="square" lIns="0" rIns="0" tIns="0" bIns="0">
+            <a:spAutoFit/>
+          </a:bodyPr>
+          <a:lstStyle/>
+          <a:p>
+            <a:pPr>
+              <a:spcAft>
+                <a:spcPts val="600"/>
+              </a:spcAft>
+              <a:defRPr sz="2000" b="1">
+                <a:solidFill>
+                  <a:srgbClr val="182D43"/>
+                </a:solidFill>
+                <a:latin typeface="Aptos"/>
+              </a:defRPr>
+            </a:pPr>
+            <a:r>
+              <a:t>Challenge the conclusion</a:t>
+            </a:r>
+          </a:p>
+        </p:txBody>
+      </p:sp>
+      <p:sp>
+        <p:nvSpPr>
+          <p:cNvPr id="15" name="TextBox 14"/>
+          <p:cNvSpPr txBox="1"/>
+          <p:nvPr/>
+        </p:nvSpPr>
+        <p:spPr>
+          <a:xfrm>
+            <a:off x="2130552" y="3730752"/>
+            <a:ext cx="9189720" cy="621792"/>
+          </a:xfrm>
+          <a:prstGeom prst="rect">
+            <a:avLst/>
+          </a:prstGeom>
+          <a:noFill/>
+        </p:spPr>
+        <p:txBody>
+          <a:bodyPr wrap="square" lIns="0" rIns="0" tIns="0" bIns="0">
+            <a:spAutoFit/>
+          </a:bodyPr>
+          <a:lstStyle/>
+          <a:p>
+            <a:pPr>
+              <a:spcAft>
+                <a:spcPts val="600"/>
+              </a:spcAft>
+              <a:defRPr sz="1600" b="0">
+                <a:solidFill>
+                  <a:srgbClr val="182D43"/>
+                </a:solidFill>
+                <a:latin typeface="Aptos"/>
+              </a:defRPr>
+            </a:pPr>
+            <a:r>
+              <a:t>Compare proposed cause with telemetry; do not count a matching narrative as proof of recall. Gate: Independent evidence supports or rejects the hypothesis.</a:t>
+            </a:r>
+          </a:p>
+        </p:txBody>
+      </p:sp>
+      <p:sp>
+        <p:nvSpPr>
+          <p:cNvPr id="16" name="Rectangle 15"/>
+          <p:cNvSpPr/>
+          <p:nvPr/>
+        </p:nvSpPr>
+        <p:spPr>
+          <a:xfrm>
+            <a:off x="502920" y="4626864"/>
+            <a:ext cx="11183112" cy="1234440"/>
+          </a:xfrm>
+          <a:prstGeom prst="rect">
+            <a:avLst/>
+          </a:prstGeom>
+          <a:solidFill>
+            <a:srgbClr val="F1F5F9"/>
+          </a:solidFill>
+          <a:ln>
+            <a:noFill/>
+          </a:ln>
+        </p:spPr>
+        <p:style>
+          <a:lnRef idx="1">
+            <a:schemeClr val="accent1"/>
+          </a:lnRef>
+          <a:fillRef idx="3">
+            <a:schemeClr val="accent1"/>
+          </a:fillRef>
+          <a:effectRef idx="2">
+            <a:schemeClr val="accent1"/>
+          </a:effectRef>
+          <a:fontRef idx="minor">
+            <a:schemeClr val="lt1"/>
+          </a:fontRef>
+        </p:style>
+        <p:txBody>
+          <a:bodyPr rtlCol="0" anchor="ctr"/>
+          <a:lstStyle/>
+          <a:p>
+            <a:pPr algn="ctr"/>
+          </a:p>
+        </p:txBody>
+      </p:sp>
+      <p:sp>
+        <p:nvSpPr>
+          <p:cNvPr id="17" name="TextBox 16"/>
+          <p:cNvSpPr txBox="1"/>
+          <p:nvPr/>
+        </p:nvSpPr>
+        <p:spPr>
+          <a:xfrm>
+            <a:off x="694944" y="4791456"/>
+            <a:ext cx="1325880" cy="301752"/>
+          </a:xfrm>
+          <a:prstGeom prst="rect">
+            <a:avLst/>
+          </a:prstGeom>
+          <a:noFill/>
+        </p:spPr>
+        <p:txBody>
+          <a:bodyPr wrap="square" lIns="0" rIns="0" tIns="0" bIns="0">
+            <a:spAutoFit/>
+          </a:bodyPr>
+          <a:lstStyle/>
+          <a:p>
+            <a:pPr>
+              <a:spcAft>
+                <a:spcPts val="600"/>
+              </a:spcAft>
+              <a:defRPr sz="1600" b="1">
+                <a:solidFill>
+                  <a:srgbClr val="975700"/>
+                </a:solidFill>
+                <a:latin typeface="Aptos"/>
+              </a:defRPr>
+            </a:pPr>
+            <a:r>
+              <a:t>10:30–12:00</a:t>
+            </a:r>
+          </a:p>
+        </p:txBody>
+      </p:sp>
+      <p:sp>
+        <p:nvSpPr>
+          <p:cNvPr id="18" name="TextBox 17"/>
+          <p:cNvSpPr txBox="1"/>
+          <p:nvPr/>
+        </p:nvSpPr>
+        <p:spPr>
+          <a:xfrm>
+            <a:off x="2130552" y="4736592"/>
+            <a:ext cx="9281160" cy="301752"/>
+          </a:xfrm>
+          <a:prstGeom prst="rect">
+            <a:avLst/>
+          </a:prstGeom>
+          <a:noFill/>
+        </p:spPr>
+        <p:txBody>
+          <a:bodyPr wrap="square" lIns="0" rIns="0" tIns="0" bIns="0">
+            <a:spAutoFit/>
+          </a:bodyPr>
+          <a:lstStyle/>
+          <a:p>
+            <a:pPr>
+              <a:spcAft>
+                <a:spcPts val="600"/>
+              </a:spcAft>
+              <a:defRPr sz="2000" b="1">
+                <a:solidFill>
+                  <a:srgbClr val="182D43"/>
+                </a:solidFill>
+                <a:latin typeface="Aptos"/>
+              </a:defRPr>
+            </a:pPr>
+            <a:r>
+              <a:t>Record a corrected outcome</a:t>
+            </a:r>
+          </a:p>
+        </p:txBody>
+      </p:sp>
+      <p:sp>
+        <p:nvSpPr>
+          <p:cNvPr id="19" name="TextBox 18"/>
+          <p:cNvSpPr txBox="1"/>
+          <p:nvPr/>
+        </p:nvSpPr>
+        <p:spPr>
+          <a:xfrm>
+            <a:off x="2130552" y="5129784"/>
+            <a:ext cx="9189720" cy="621792"/>
+          </a:xfrm>
+          <a:prstGeom prst="rect">
+            <a:avLst/>
+          </a:prstGeom>
+          <a:noFill/>
+        </p:spPr>
+        <p:txBody>
+          <a:bodyPr wrap="square" lIns="0" rIns="0" tIns="0" bIns="0">
+            <a:spAutoFit/>
+          </a:bodyPr>
+          <a:lstStyle/>
+          <a:p>
+            <a:pPr>
+              <a:spcAft>
+                <a:spcPts val="600"/>
+              </a:spcAft>
+              <a:defRPr sz="1600" b="0">
+                <a:solidFill>
+                  <a:srgbClr val="182D43"/>
+                </a:solidFill>
+                <a:latin typeface="Aptos"/>
+              </a:defRPr>
+            </a:pPr>
+            <a:r>
+              <a:t>Submit the reviewed cause using Add feedback; inspect the reflection or a prepared record. Gate: Feedback and memory version retained; later recall checked separately.</a:t>
+            </a:r>
+          </a:p>
+        </p:txBody>
+      </p:sp>
+    </p:spTree>
+  </p:cSld>
+  <p:clrMapOvr>
+    <a:masterClrMapping/>
+  </p:clrMapOvr>
+</p:sld>
+</file>
+
+<file path=ppt/slides/slide14.xml><?xml version="1.0" encoding="utf-8"?>
+<p:sld xmlns:a="http://schemas.openxmlformats.org/drawingml/2006/main" xmlns:p="http://schemas.openxmlformats.org/presentationml/2006/main" xmlns:r="http://schemas.openxmlformats.org/officeDocument/2006/relationships">
+  <p:cSld>
+    <p:bg>
+      <p:bgPr>
+        <a:solidFill>
+          <a:srgbClr val="FFFFFF"/>
+        </a:solidFill>
+        <a:effectLst/>
+      </p:bgPr>
+    </p:bg>
+    <p:spTree>
+      <p:nvGrpSpPr>
+        <p:cNvPr id="1" name=""/>
+        <p:cNvGrpSpPr/>
+        <p:nvPr/>
+      </p:nvGrpSpPr>
+      <p:grpSpPr/>
+      <p:sp>
+        <p:nvSpPr>
+          <p:cNvPr id="2" name="Rectangle 1"/>
+          <p:cNvSpPr/>
+          <p:nvPr/>
+        </p:nvSpPr>
+        <p:spPr>
+          <a:xfrm>
+            <a:off x="0" y="0"/>
+            <a:ext cx="12191695" cy="128016"/>
+          </a:xfrm>
+          <a:prstGeom prst="rect">
+            <a:avLst/>
+          </a:prstGeom>
+          <a:solidFill>
+            <a:srgbClr val="975700"/>
+          </a:solidFill>
+          <a:ln>
+            <a:noFill/>
+          </a:ln>
+        </p:spPr>
+        <p:style>
+          <a:lnRef idx="1">
+            <a:schemeClr val="accent1"/>
+          </a:lnRef>
+          <a:fillRef idx="3">
+            <a:schemeClr val="accent1"/>
+          </a:fillRef>
+          <a:effectRef idx="2">
+            <a:schemeClr val="accent1"/>
+          </a:effectRef>
+          <a:fontRef idx="minor">
+            <a:schemeClr val="lt1"/>
+          </a:fontRef>
+        </p:style>
+        <p:txBody>
+          <a:bodyPr rtlCol="0" anchor="ctr"/>
+          <a:lstStyle/>
+          <a:p>
+            <a:pPr algn="ctr"/>
+          </a:p>
+        </p:txBody>
+      </p:sp>
+      <p:sp>
+        <p:nvSpPr>
+          <p:cNvPr id="3" name="TextBox 2"/>
+          <p:cNvSpPr txBox="1"/>
+          <p:nvPr/>
+        </p:nvSpPr>
+        <p:spPr>
+          <a:xfrm>
+            <a:off x="502920" y="347472"/>
+            <a:ext cx="11155680" cy="256032"/>
+          </a:xfrm>
+          <a:prstGeom prst="rect">
+            <a:avLst/>
+          </a:prstGeom>
+          <a:noFill/>
+        </p:spPr>
+        <p:txBody>
+          <a:bodyPr wrap="square" lIns="0" rIns="0" tIns="0" bIns="0">
+            <a:spAutoFit/>
+          </a:bodyPr>
+          <a:lstStyle/>
+          <a:p>
+            <a:pPr>
+              <a:spcAft>
+                <a:spcPts val="600"/>
+              </a:spcAft>
+              <a:defRPr sz="1100" b="1">
+                <a:solidFill>
+                  <a:srgbClr val="975700"/>
+                </a:solidFill>
+                <a:latin typeface="Aptos"/>
+              </a:defRPr>
+            </a:pPr>
+            <a:r>
+              <a:t>OFFICIAL DOCUMENTATION</a:t>
+            </a:r>
+          </a:p>
+        </p:txBody>
+      </p:sp>
+      <p:sp>
+        <p:nvSpPr>
+          <p:cNvPr id="4" name="TextBox 3"/>
+          <p:cNvSpPr txBox="1"/>
+          <p:nvPr/>
+        </p:nvSpPr>
+        <p:spPr>
+          <a:xfrm>
+            <a:off x="502920" y="777240"/>
+            <a:ext cx="11155680" cy="868680"/>
+          </a:xfrm>
+          <a:prstGeom prst="rect">
+            <a:avLst/>
+          </a:prstGeom>
+          <a:noFill/>
+        </p:spPr>
+        <p:txBody>
+          <a:bodyPr wrap="square" lIns="0" rIns="0" tIns="0" bIns="0">
+            <a:spAutoFit/>
+          </a:bodyPr>
+          <a:lstStyle/>
+          <a:p>
+            <a:pPr>
+              <a:spcAft>
+                <a:spcPts val="600"/>
+              </a:spcAft>
+              <a:defRPr sz="2900" b="1">
+                <a:solidFill>
+                  <a:srgbClr val="182D43"/>
+                </a:solidFill>
+                <a:latin typeface="Aptos"/>
+              </a:defRPr>
+            </a:pPr>
+            <a:r>
+              <a:t>Evidence and delivery boundary</a:t>
+            </a:r>
+          </a:p>
+        </p:txBody>
+      </p:sp>
+      <p:sp>
+        <p:nvSpPr>
+          <p:cNvPr id="5" name="Rectangle 4"/>
+          <p:cNvSpPr/>
+          <p:nvPr/>
+        </p:nvSpPr>
+        <p:spPr>
+          <a:xfrm>
+            <a:off x="502920" y="6473952"/>
+            <a:ext cx="11155680" cy="10972"/>
+          </a:xfrm>
+          <a:prstGeom prst="rect">
+            <a:avLst/>
+          </a:prstGeom>
+          <a:solidFill>
+            <a:srgbClr val="D4DFE9"/>
+          </a:solidFill>
+          <a:ln>
+            <a:noFill/>
+          </a:ln>
+        </p:spPr>
+        <p:style>
+          <a:lnRef idx="1">
+            <a:schemeClr val="accent1"/>
+          </a:lnRef>
+          <a:fillRef idx="3">
+            <a:schemeClr val="accent1"/>
+          </a:fillRef>
+          <a:effectRef idx="2">
+            <a:schemeClr val="accent1"/>
+          </a:effectRef>
+          <a:fontRef idx="minor">
+            <a:schemeClr val="lt1"/>
+          </a:fontRef>
+        </p:style>
+        <p:txBody>
+          <a:bodyPr rtlCol="0" anchor="ctr"/>
+          <a:lstStyle/>
+          <a:p>
+            <a:pPr algn="ctr"/>
+          </a:p>
+        </p:txBody>
+      </p:sp>
+      <p:sp>
+        <p:nvSpPr>
+          <p:cNvPr id="6" name="TextBox 5"/>
+          <p:cNvSpPr txBox="1"/>
+          <p:nvPr/>
+        </p:nvSpPr>
+        <p:spPr>
+          <a:xfrm>
+            <a:off x="502920" y="6565392"/>
+            <a:ext cx="9601200" cy="182880"/>
+          </a:xfrm>
+          <a:prstGeom prst="rect">
+            <a:avLst/>
+          </a:prstGeom>
+          <a:noFill/>
+        </p:spPr>
+        <p:txBody>
+          <a:bodyPr wrap="square" lIns="0" rIns="0" tIns="0" bIns="0">
+            <a:spAutoFit/>
+          </a:bodyPr>
+          <a:lstStyle/>
+          <a:p>
+            <a:pPr>
+              <a:spcAft>
+                <a:spcPts val="600"/>
+              </a:spcAft>
+              <a:defRPr sz="900" b="0">
+                <a:solidFill>
+                  <a:srgbClr val="52657A"/>
+                </a:solidFill>
+                <a:latin typeface="Aptos"/>
+              </a:defRPr>
+            </a:pPr>
+            <a:r>
+              <a:t>AWS DevOps Agent | Mechanism reference | 21 Oct 2026</a:t>
+            </a:r>
+          </a:p>
+        </p:txBody>
+      </p:sp>
+      <p:sp>
+        <p:nvSpPr>
+          <p:cNvPr id="7" name="TextBox 6"/>
+          <p:cNvSpPr txBox="1"/>
+          <p:nvPr/>
+        </p:nvSpPr>
+        <p:spPr>
+          <a:xfrm>
+            <a:off x="10149840" y="6565392"/>
+            <a:ext cx="1554480" cy="182880"/>
+          </a:xfrm>
+          <a:prstGeom prst="rect">
+            <a:avLst/>
+          </a:prstGeom>
+          <a:noFill/>
+        </p:spPr>
+        <p:txBody>
+          <a:bodyPr wrap="square" lIns="0" rIns="0" tIns="0" bIns="0">
+            <a:spAutoFit/>
+          </a:bodyPr>
+          <a:lstStyle/>
+          <a:p>
+            <a:pPr>
+              <a:spcAft>
+                <a:spcPts val="600"/>
+              </a:spcAft>
+              <a:defRPr sz="900" b="0">
+                <a:solidFill>
+                  <a:srgbClr val="52657A"/>
+                </a:solidFill>
+                <a:latin typeface="Aptos"/>
+              </a:defRPr>
+            </a:pPr>
+            <a:r>
+              <a:t>14 / UNTIMED</a:t>
+            </a:r>
+          </a:p>
+        </p:txBody>
+      </p:sp>
+      <p:sp>
+        <p:nvSpPr>
           <p:cNvPr id="8" name="TextBox 7"/>
           <p:cNvSpPr txBox="1"/>
           <p:nvPr/>
@@ -9659,7 +10791,7 @@
               <a:rPr>
                 <a:hlinkClick r:id="rId5"/>
               </a:rPr>
-              <a:t>[DL] Learned Skills: migration to memory</a:t>
+              <a:t>[DN] DevOps Agent dated product changes</a:t>
             </a:r>
           </a:p>
         </p:txBody>
@@ -9701,7 +10833,7 @@
               <a:rPr>
                 <a:hlinkClick r:id="rId6"/>
               </a:rPr>
-              <a:t>[DT] Topology and resource discovery</a:t>
+              <a:t>[DL] Learned Skills: migration to memory</a:t>
             </a:r>
           </a:p>
         </p:txBody>
@@ -9743,7 +10875,7 @@
               <a:rPr>
                 <a:hlinkClick r:id="rId7"/>
               </a:rPr>
-              <a:t>[DC] Creating a custom agent</a:t>
+              <a:t>[DT] Topology and resource discovery</a:t>
             </a:r>
           </a:p>
         </p:txBody>
@@ -9785,7 +10917,7 @@
               <a:rPr>
                 <a:hlinkClick r:id="rId8"/>
               </a:rPr>
-              <a:t>[DI] Agent instructions</a:t>
+              <a:t>[DC] Creating a custom agent</a:t>
             </a:r>
           </a:p>
         </p:txBody>
@@ -9827,7 +10959,7 @@
               <a:rPr>
                 <a:hlinkClick r:id="rId9"/>
               </a:rPr>
-              <a:t>[DS] DevOps Agent Skills</a:t>
+              <a:t>[DI] Agent instructions</a:t>
             </a:r>
           </a:p>
         </p:txBody>
@@ -9869,7 +11001,7 @@
               <a:rPr>
                 <a:hlinkClick r:id="rId10"/>
               </a:rPr>
-              <a:t>[DA] Limiting agent access in an AWS account</a:t>
+              <a:t>[DS] DevOps Agent Skills</a:t>
             </a:r>
           </a:p>
         </p:txBody>
@@ -9911,7 +11043,7 @@
               <a:rPr>
                 <a:hlinkClick r:id="rId11"/>
               </a:rPr>
-              <a:t>[DW] Invoking DevOps Agent through Webhook</a:t>
+              <a:t>[DA] Limiting agent access in an AWS account</a:t>
             </a:r>
           </a:p>
         </p:txBody>
@@ -9953,7 +11085,7 @@
               <a:rPr>
                 <a:hlinkClick r:id="rId12"/>
               </a:rPr>
-              <a:t>[DX] Executing custom agents</a:t>
+              <a:t>[DW] Invoking DevOps Agent through Webhook</a:t>
             </a:r>
           </a:p>
         </p:txBody>
@@ -9995,6 +11127,48 @@
               <a:rPr>
                 <a:hlinkClick r:id="rId13"/>
               </a:rPr>
+              <a:t>[DX] Executing custom agents</a:t>
+            </a:r>
+          </a:p>
+        </p:txBody>
+      </p:sp>
+      <p:sp>
+        <p:nvSpPr>
+          <p:cNvPr id="20" name="TextBox 19"/>
+          <p:cNvSpPr txBox="1"/>
+          <p:nvPr/>
+        </p:nvSpPr>
+        <p:spPr>
+          <a:xfrm>
+            <a:off x="6263640" y="4251960"/>
+            <a:ext cx="5394960" cy="283464"/>
+          </a:xfrm>
+          <a:prstGeom prst="rect">
+            <a:avLst/>
+          </a:prstGeom>
+          <a:noFill/>
+        </p:spPr>
+        <p:txBody>
+          <a:bodyPr wrap="square" lIns="0" rIns="0" tIns="0" bIns="0">
+            <a:spAutoFit/>
+          </a:bodyPr>
+          <a:lstStyle/>
+          <a:p>
+            <a:pPr>
+              <a:spcAft>
+                <a:spcPts val="600"/>
+              </a:spcAft>
+              <a:defRPr sz="1300" b="0">
+                <a:solidFill>
+                  <a:srgbClr val="975700"/>
+                </a:solidFill>
+                <a:latin typeface="Aptos"/>
+              </a:defRPr>
+            </a:pPr>
+            <a:r>
+              <a:rPr>
+                <a:hlinkClick r:id="rId14"/>
+              </a:rPr>
               <a:t>[DE] Directed actions</a:t>
             </a:r>
           </a:p>
@@ -10002,7 +11176,49 @@
       </p:sp>
       <p:sp>
         <p:nvSpPr>
-          <p:cNvPr id="20" name="TextBox 19"/>
+          <p:cNvPr id="21" name="TextBox 20"/>
+          <p:cNvSpPr txBox="1"/>
+          <p:nvPr/>
+        </p:nvSpPr>
+        <p:spPr>
+          <a:xfrm>
+            <a:off x="594360" y="4590288"/>
+            <a:ext cx="5394960" cy="283464"/>
+          </a:xfrm>
+          <a:prstGeom prst="rect">
+            <a:avLst/>
+          </a:prstGeom>
+          <a:noFill/>
+        </p:spPr>
+        <p:txBody>
+          <a:bodyPr wrap="square" lIns="0" rIns="0" tIns="0" bIns="0">
+            <a:spAutoFit/>
+          </a:bodyPr>
+          <a:lstStyle/>
+          <a:p>
+            <a:pPr>
+              <a:spcAft>
+                <a:spcPts val="600"/>
+              </a:spcAft>
+              <a:defRPr sz="1300" b="0">
+                <a:solidFill>
+                  <a:srgbClr val="975700"/>
+                </a:solidFill>
+                <a:latin typeface="Aptos"/>
+              </a:defRPr>
+            </a:pPr>
+            <a:r>
+              <a:rPr>
+                <a:hlinkClick r:id="rId15"/>
+              </a:rPr>
+              <a:t>[DF] Provide feedback on investigations</a:t>
+            </a:r>
+          </a:p>
+        </p:txBody>
+      </p:sp>
+      <p:sp>
+        <p:nvSpPr>
+          <p:cNvPr id="22" name="TextBox 21"/>
           <p:cNvSpPr txBox="1"/>
           <p:nvPr/>
         </p:nvSpPr>
@@ -10857,7 +12073,7 @@
               </a:defRPr>
             </a:pPr>
             <a:r>
-              <a:t>Official sources: DM, DG · Agent Space / Operator Web App</a:t>
+              <a:t>Official sources: DM, DG, DN · Agent Space / Operator Web App</a:t>
             </a:r>
           </a:p>
         </p:txBody>
